--- a/GW2_Portfolio.pptx
+++ b/GW2_Portfolio.pptx
@@ -10454,7 +10454,7 @@
         </p:nvSpPr>
         <p:spPr>
           <a:xfrm>
-            <a:off x="1600200" y="2240280"/>
+            <a:off x="2240280" y="2240280"/>
             <a:ext cx="1280160" cy="502920"/>
           </a:xfrm>
           <a:prstGeom prst="rect">
@@ -10490,8 +10490,8 @@
         </p:nvSpPr>
         <p:spPr>
           <a:xfrm>
-            <a:off x="3703320" y="1234440"/>
-            <a:ext cx="1280160" cy="502920"/>
+            <a:off x="4846320" y="868680"/>
+            <a:ext cx="1463040" cy="292608"/>
           </a:xfrm>
           <a:prstGeom prst="rect">
             <a:avLst/>
@@ -10512,6 +10512,41 @@
                 </a:solidFill>
                 <a:latin typeface="Calibri"/>
               </a:rPr>
+              <a:t>타겟 사망 →</a:t>
+            </a:r>
+          </a:p>
+        </p:txBody>
+      </p:sp>
+      <p:sp>
+        <p:nvSpPr>
+          <p:cNvPr id="18" name="TextBox 17"/>
+          <p:cNvSpPr txBox="1"/>
+          <p:nvPr/>
+        </p:nvSpPr>
+        <p:spPr>
+          <a:xfrm>
+            <a:off x="4846320" y="1188720"/>
+            <a:ext cx="1463040" cy="292608"/>
+          </a:xfrm>
+          <a:prstGeom prst="rect">
+            <a:avLst/>
+          </a:prstGeom>
+          <a:noFill/>
+        </p:spPr>
+        <p:txBody>
+          <a:bodyPr wrap="square">
+            <a:spAutoFit/>
+          </a:bodyPr>
+          <a:lstStyle/>
+          <a:p>
+            <a:pPr algn="ctr"/>
+            <a:r>
+              <a:rPr sz="900" b="0" i="0">
+                <a:solidFill>
+                  <a:srgbClr val="5A6478"/>
+                </a:solidFill>
+                <a:latin typeface="Calibri"/>
+              </a:rPr>
               <a:t>↑ 적 탐지</a:t>
             </a:r>
           </a:p>
@@ -10519,14 +10554,49 @@
       </p:sp>
       <p:sp>
         <p:nvSpPr>
-          <p:cNvPr id="18" name="TextBox 17"/>
+          <p:cNvPr id="19" name="TextBox 18"/>
+          <p:cNvSpPr txBox="1"/>
+          <p:nvPr/>
+        </p:nvSpPr>
+        <p:spPr>
+          <a:xfrm>
+            <a:off x="4846320" y="1508760"/>
+            <a:ext cx="2377440" cy="292608"/>
+          </a:xfrm>
+          <a:prstGeom prst="rect">
+            <a:avLst/>
+          </a:prstGeom>
+          <a:noFill/>
+        </p:spPr>
+        <p:txBody>
+          <a:bodyPr wrap="square">
+            <a:spAutoFit/>
+          </a:bodyPr>
+          <a:lstStyle/>
+          <a:p>
+            <a:pPr algn="ctr"/>
+            <a:r>
+              <a:rPr sz="900" b="0" i="0">
+                <a:solidFill>
+                  <a:srgbClr val="5A6478"/>
+                </a:solidFill>
+                <a:latin typeface="Calibri"/>
+              </a:rPr>
+              <a:t>사거리 진입 →  /  ← 이탈</a:t>
+            </a:r>
+          </a:p>
+        </p:txBody>
+      </p:sp>
+      <p:sp>
+        <p:nvSpPr>
+          <p:cNvPr id="20" name="TextBox 19"/>
           <p:cNvSpPr txBox="1"/>
           <p:nvPr/>
         </p:nvSpPr>
         <p:spPr>
           <a:xfrm>
             <a:off x="3703320" y="2514600"/>
-            <a:ext cx="1280160" cy="502920"/>
+            <a:ext cx="731520" cy="292608"/>
           </a:xfrm>
           <a:prstGeom prst="rect">
             <a:avLst/>
@@ -10554,112 +10624,7 @@
       </p:sp>
       <p:sp>
         <p:nvSpPr>
-          <p:cNvPr id="19" name="TextBox 18"/>
-          <p:cNvSpPr txBox="1"/>
-          <p:nvPr/>
-        </p:nvSpPr>
-        <p:spPr>
-          <a:xfrm>
-            <a:off x="5806440" y="2240280"/>
-            <a:ext cx="1280160" cy="502920"/>
-          </a:xfrm>
-          <a:prstGeom prst="rect">
-            <a:avLst/>
-          </a:prstGeom>
-          <a:noFill/>
-        </p:spPr>
-        <p:txBody>
-          <a:bodyPr wrap="square">
-            <a:spAutoFit/>
-          </a:bodyPr>
-          <a:lstStyle/>
-          <a:p>
-            <a:pPr algn="ctr"/>
-            <a:r>
-              <a:rPr sz="900" b="0" i="0">
-                <a:solidFill>
-                  <a:srgbClr val="5A6478"/>
-                </a:solidFill>
-                <a:latin typeface="Calibri"/>
-              </a:rPr>
-              <a:t>→ 사거리 진입</a:t>
-            </a:r>
-          </a:p>
-        </p:txBody>
-      </p:sp>
-      <p:sp>
-        <p:nvSpPr>
-          <p:cNvPr id="20" name="TextBox 19"/>
-          <p:cNvSpPr txBox="1"/>
-          <p:nvPr/>
-        </p:nvSpPr>
-        <p:spPr>
-          <a:xfrm>
-            <a:off x="5806440" y="2743200"/>
-            <a:ext cx="1280160" cy="502920"/>
-          </a:xfrm>
-          <a:prstGeom prst="rect">
-            <a:avLst/>
-          </a:prstGeom>
-          <a:noFill/>
-        </p:spPr>
-        <p:txBody>
-          <a:bodyPr wrap="square">
-            <a:spAutoFit/>
-          </a:bodyPr>
-          <a:lstStyle/>
-          <a:p>
-            <a:pPr algn="ctr"/>
-            <a:r>
-              <a:rPr sz="900" b="0" i="0">
-                <a:solidFill>
-                  <a:srgbClr val="5A6478"/>
-                </a:solidFill>
-                <a:latin typeface="Calibri"/>
-              </a:rPr>
-              <a:t>← 사거리 이탈</a:t>
-            </a:r>
-          </a:p>
-        </p:txBody>
-      </p:sp>
-      <p:sp>
-        <p:nvSpPr>
-          <p:cNvPr id="21" name="TextBox 20"/>
-          <p:cNvSpPr txBox="1"/>
-          <p:nvPr/>
-        </p:nvSpPr>
-        <p:spPr>
-          <a:xfrm>
-            <a:off x="5029200" y="914400"/>
-            <a:ext cx="1280160" cy="502920"/>
-          </a:xfrm>
-          <a:prstGeom prst="rect">
-            <a:avLst/>
-          </a:prstGeom>
-          <a:noFill/>
-        </p:spPr>
-        <p:txBody>
-          <a:bodyPr wrap="square">
-            <a:spAutoFit/>
-          </a:bodyPr>
-          <a:lstStyle/>
-          <a:p>
-            <a:pPr algn="ctr"/>
-            <a:r>
-              <a:rPr sz="900" b="0" i="0">
-                <a:solidFill>
-                  <a:srgbClr val="5A6478"/>
-                </a:solidFill>
-                <a:latin typeface="Calibri"/>
-              </a:rPr>
-              <a:t>타겟 사망 →</a:t>
-            </a:r>
-          </a:p>
-        </p:txBody>
-      </p:sp>
-      <p:sp>
-        <p:nvSpPr>
-          <p:cNvPr id="22" name="Rectangle 21"/>
+          <p:cNvPr id="21" name="Rectangle 20"/>
           <p:cNvSpPr/>
           <p:nvPr/>
         </p:nvSpPr>
@@ -10704,7 +10669,7 @@
       </p:sp>
       <p:sp>
         <p:nvSpPr>
-          <p:cNvPr id="23" name="Rectangle 22"/>
+          <p:cNvPr id="22" name="Rectangle 21"/>
           <p:cNvSpPr/>
           <p:nvPr/>
         </p:nvSpPr>
@@ -10747,7 +10712,7 @@
       </p:sp>
       <p:sp>
         <p:nvSpPr>
-          <p:cNvPr id="24" name="TextBox 23"/>
+          <p:cNvPr id="23" name="TextBox 22"/>
           <p:cNvSpPr txBox="1"/>
           <p:nvPr/>
         </p:nvSpPr>
@@ -10782,7 +10747,7 @@
       </p:sp>
       <p:sp>
         <p:nvSpPr>
-          <p:cNvPr id="25" name="TextBox 24"/>
+          <p:cNvPr id="24" name="TextBox 23"/>
           <p:cNvSpPr txBox="1"/>
           <p:nvPr/>
         </p:nvSpPr>
@@ -10819,7 +10784,7 @@
       </p:sp>
       <p:sp>
         <p:nvSpPr>
-          <p:cNvPr id="26" name="Rectangle 25"/>
+          <p:cNvPr id="25" name="Rectangle 24"/>
           <p:cNvSpPr/>
           <p:nvPr/>
         </p:nvSpPr>
@@ -10864,7 +10829,7 @@
       </p:sp>
       <p:sp>
         <p:nvSpPr>
-          <p:cNvPr id="27" name="Rectangle 26"/>
+          <p:cNvPr id="26" name="Rectangle 25"/>
           <p:cNvSpPr/>
           <p:nvPr/>
         </p:nvSpPr>
@@ -10907,7 +10872,7 @@
       </p:sp>
       <p:sp>
         <p:nvSpPr>
-          <p:cNvPr id="28" name="TextBox 27"/>
+          <p:cNvPr id="27" name="TextBox 26"/>
           <p:cNvSpPr txBox="1"/>
           <p:nvPr/>
         </p:nvSpPr>
@@ -10942,7 +10907,7 @@
       </p:sp>
       <p:sp>
         <p:nvSpPr>
-          <p:cNvPr id="29" name="TextBox 28"/>
+          <p:cNvPr id="28" name="TextBox 27"/>
           <p:cNvSpPr txBox="1"/>
           <p:nvPr/>
         </p:nvSpPr>
@@ -10979,7 +10944,7 @@
       </p:sp>
       <p:sp>
         <p:nvSpPr>
-          <p:cNvPr id="30" name="Rectangle 29"/>
+          <p:cNvPr id="29" name="Rectangle 28"/>
           <p:cNvSpPr/>
           <p:nvPr/>
         </p:nvSpPr>
@@ -11024,7 +10989,7 @@
       </p:sp>
       <p:sp>
         <p:nvSpPr>
-          <p:cNvPr id="31" name="Rectangle 30"/>
+          <p:cNvPr id="30" name="Rectangle 29"/>
           <p:cNvSpPr/>
           <p:nvPr/>
         </p:nvSpPr>
@@ -11067,7 +11032,7 @@
       </p:sp>
       <p:sp>
         <p:nvSpPr>
-          <p:cNvPr id="32" name="TextBox 31"/>
+          <p:cNvPr id="31" name="TextBox 30"/>
           <p:cNvSpPr txBox="1"/>
           <p:nvPr/>
         </p:nvSpPr>
@@ -11102,7 +11067,7 @@
       </p:sp>
       <p:sp>
         <p:nvSpPr>
-          <p:cNvPr id="33" name="TextBox 32"/>
+          <p:cNvPr id="32" name="TextBox 31"/>
           <p:cNvSpPr txBox="1"/>
           <p:nvPr/>
         </p:nvSpPr>
@@ -11139,7 +11104,7 @@
       </p:sp>
       <p:sp>
         <p:nvSpPr>
-          <p:cNvPr id="34" name="Rectangle 33"/>
+          <p:cNvPr id="33" name="Rectangle 32"/>
           <p:cNvSpPr/>
           <p:nvPr/>
         </p:nvSpPr>
@@ -11184,7 +11149,7 @@
       </p:sp>
       <p:sp>
         <p:nvSpPr>
-          <p:cNvPr id="35" name="Rectangle 34"/>
+          <p:cNvPr id="34" name="Rectangle 33"/>
           <p:cNvSpPr/>
           <p:nvPr/>
         </p:nvSpPr>
@@ -11227,7 +11192,7 @@
       </p:sp>
       <p:sp>
         <p:nvSpPr>
-          <p:cNvPr id="36" name="TextBox 35"/>
+          <p:cNvPr id="35" name="TextBox 34"/>
           <p:cNvSpPr txBox="1"/>
           <p:nvPr/>
         </p:nvSpPr>
@@ -11262,7 +11227,7 @@
       </p:sp>
       <p:sp>
         <p:nvSpPr>
-          <p:cNvPr id="37" name="TextBox 36"/>
+          <p:cNvPr id="36" name="TextBox 35"/>
           <p:cNvSpPr txBox="1"/>
           <p:nvPr/>
         </p:nvSpPr>
@@ -11997,8 +11962,8 @@
         </p:nvSpPr>
         <p:spPr>
           <a:xfrm>
-            <a:off x="4343400" y="1234440"/>
-            <a:ext cx="4434840" cy="384048"/>
+            <a:off x="4343400" y="1207008"/>
+            <a:ext cx="4434840" cy="274320"/>
           </a:xfrm>
           <a:prstGeom prst="rect">
             <a:avLst/>
@@ -12040,8 +12005,8 @@
         </p:nvSpPr>
         <p:spPr>
           <a:xfrm>
-            <a:off x="4434840" y="1307592"/>
-            <a:ext cx="4251960" cy="256032"/>
+            <a:off x="4434840" y="1243584"/>
+            <a:ext cx="4251960" cy="201168"/>
           </a:xfrm>
           <a:prstGeom prst="rect">
             <a:avLst/>
@@ -12075,8 +12040,8 @@
         </p:nvSpPr>
         <p:spPr>
           <a:xfrm>
-            <a:off x="4343400" y="1655064"/>
-            <a:ext cx="4434840" cy="256032"/>
+            <a:off x="4343400" y="1517904"/>
+            <a:ext cx="4434840" cy="201168"/>
           </a:xfrm>
           <a:prstGeom prst="rect">
             <a:avLst/>
@@ -12110,8 +12075,8 @@
         </p:nvSpPr>
         <p:spPr>
           <a:xfrm>
-            <a:off x="4343400" y="1947672"/>
-            <a:ext cx="4434840" cy="384048"/>
+            <a:off x="4343400" y="1755648"/>
+            <a:ext cx="4434840" cy="274320"/>
           </a:xfrm>
           <a:prstGeom prst="rect">
             <a:avLst/>
@@ -12153,8 +12118,8 @@
         </p:nvSpPr>
         <p:spPr>
           <a:xfrm>
-            <a:off x="4434840" y="2020824"/>
-            <a:ext cx="4251960" cy="256032"/>
+            <a:off x="4434840" y="1792224"/>
+            <a:ext cx="4251960" cy="201168"/>
           </a:xfrm>
           <a:prstGeom prst="rect">
             <a:avLst/>
@@ -12188,8 +12153,8 @@
         </p:nvSpPr>
         <p:spPr>
           <a:xfrm>
-            <a:off x="4343400" y="2368296"/>
-            <a:ext cx="4434840" cy="384048"/>
+            <a:off x="4343400" y="2066544"/>
+            <a:ext cx="4434840" cy="274320"/>
           </a:xfrm>
           <a:prstGeom prst="rect">
             <a:avLst/>
@@ -12231,8 +12196,8 @@
         </p:nvSpPr>
         <p:spPr>
           <a:xfrm>
-            <a:off x="4434840" y="2441448"/>
-            <a:ext cx="4251960" cy="256032"/>
+            <a:off x="4434840" y="2103120"/>
+            <a:ext cx="4251960" cy="201168"/>
           </a:xfrm>
           <a:prstGeom prst="rect">
             <a:avLst/>
@@ -12266,8 +12231,8 @@
         </p:nvSpPr>
         <p:spPr>
           <a:xfrm>
-            <a:off x="4343400" y="2788920"/>
-            <a:ext cx="4434840" cy="384048"/>
+            <a:off x="4343400" y="2377440"/>
+            <a:ext cx="4434840" cy="274320"/>
           </a:xfrm>
           <a:prstGeom prst="rect">
             <a:avLst/>
@@ -12309,8 +12274,8 @@
         </p:nvSpPr>
         <p:spPr>
           <a:xfrm>
-            <a:off x="4434840" y="2862072"/>
-            <a:ext cx="4251960" cy="256032"/>
+            <a:off x="4434840" y="2414016"/>
+            <a:ext cx="4251960" cy="201168"/>
           </a:xfrm>
           <a:prstGeom prst="rect">
             <a:avLst/>
@@ -12344,8 +12309,8 @@
         </p:nvSpPr>
         <p:spPr>
           <a:xfrm>
-            <a:off x="4343400" y="3209544"/>
-            <a:ext cx="4434840" cy="384048"/>
+            <a:off x="4343400" y="2688336"/>
+            <a:ext cx="4434840" cy="274320"/>
           </a:xfrm>
           <a:prstGeom prst="rect">
             <a:avLst/>
@@ -12387,8 +12352,8 @@
         </p:nvSpPr>
         <p:spPr>
           <a:xfrm>
-            <a:off x="4434840" y="3282696"/>
-            <a:ext cx="4251960" cy="256032"/>
+            <a:off x="4434840" y="2724912"/>
+            <a:ext cx="4251960" cy="201168"/>
           </a:xfrm>
           <a:prstGeom prst="rect">
             <a:avLst/>
@@ -12422,8 +12387,8 @@
         </p:nvSpPr>
         <p:spPr>
           <a:xfrm>
-            <a:off x="4343400" y="3630168"/>
-            <a:ext cx="4434840" cy="384048"/>
+            <a:off x="4343400" y="2999232"/>
+            <a:ext cx="4434840" cy="274320"/>
           </a:xfrm>
           <a:prstGeom prst="rect">
             <a:avLst/>
@@ -12465,8 +12430,8 @@
         </p:nvSpPr>
         <p:spPr>
           <a:xfrm>
-            <a:off x="4434840" y="3703320"/>
-            <a:ext cx="4251960" cy="256032"/>
+            <a:off x="4434840" y="3035808"/>
+            <a:ext cx="4251960" cy="201168"/>
           </a:xfrm>
           <a:prstGeom prst="rect">
             <a:avLst/>
@@ -12500,8 +12465,8 @@
         </p:nvSpPr>
         <p:spPr>
           <a:xfrm>
-            <a:off x="4343400" y="4050791"/>
-            <a:ext cx="4434840" cy="256032"/>
+            <a:off x="4343400" y="3310127"/>
+            <a:ext cx="4434840" cy="201168"/>
           </a:xfrm>
           <a:prstGeom prst="rect">
             <a:avLst/>
@@ -12535,8 +12500,8 @@
         </p:nvSpPr>
         <p:spPr>
           <a:xfrm>
-            <a:off x="4343400" y="4343400"/>
-            <a:ext cx="4434840" cy="384048"/>
+            <a:off x="4343400" y="3547872"/>
+            <a:ext cx="4434840" cy="274320"/>
           </a:xfrm>
           <a:prstGeom prst="rect">
             <a:avLst/>
@@ -12578,8 +12543,8 @@
         </p:nvSpPr>
         <p:spPr>
           <a:xfrm>
-            <a:off x="4434840" y="4416552"/>
-            <a:ext cx="4251960" cy="256032"/>
+            <a:off x="4434840" y="3584448"/>
+            <a:ext cx="4251960" cy="201168"/>
           </a:xfrm>
           <a:prstGeom prst="rect">
             <a:avLst/>
@@ -12613,8 +12578,8 @@
         </p:nvSpPr>
         <p:spPr>
           <a:xfrm>
-            <a:off x="4343400" y="4764024"/>
-            <a:ext cx="4434840" cy="384048"/>
+            <a:off x="4343400" y="3858768"/>
+            <a:ext cx="4434840" cy="274320"/>
           </a:xfrm>
           <a:prstGeom prst="rect">
             <a:avLst/>
@@ -12656,8 +12621,8 @@
         </p:nvSpPr>
         <p:spPr>
           <a:xfrm>
-            <a:off x="4434840" y="4837176"/>
-            <a:ext cx="4251960" cy="256032"/>
+            <a:off x="4434840" y="3895344"/>
+            <a:ext cx="4251960" cy="201168"/>
           </a:xfrm>
           <a:prstGeom prst="rect">
             <a:avLst/>
@@ -12691,8 +12656,8 @@
         </p:nvSpPr>
         <p:spPr>
           <a:xfrm>
-            <a:off x="4343400" y="5184648"/>
-            <a:ext cx="4434840" cy="384048"/>
+            <a:off x="4343400" y="4169663"/>
+            <a:ext cx="4434840" cy="274320"/>
           </a:xfrm>
           <a:prstGeom prst="rect">
             <a:avLst/>
@@ -12734,8 +12699,8 @@
         </p:nvSpPr>
         <p:spPr>
           <a:xfrm>
-            <a:off x="4434840" y="5257800"/>
-            <a:ext cx="4251960" cy="256032"/>
+            <a:off x="4434840" y="4206240"/>
+            <a:ext cx="4251960" cy="201168"/>
           </a:xfrm>
           <a:prstGeom prst="rect">
             <a:avLst/>
@@ -13777,7 +13742,7 @@
         <p:spPr>
           <a:xfrm>
             <a:off x="457200" y="3456432"/>
-            <a:ext cx="1417320" cy="1115568"/>
+            <a:ext cx="1316736" cy="1115568"/>
           </a:xfrm>
           <a:prstGeom prst="rect">
             <a:avLst/>
@@ -13822,7 +13787,7 @@
         <p:spPr>
           <a:xfrm>
             <a:off x="530352" y="3566160"/>
-            <a:ext cx="1280160" cy="914400"/>
+            <a:ext cx="1179576" cy="914400"/>
           </a:xfrm>
           <a:prstGeom prst="rect">
             <a:avLst/>
@@ -13857,8 +13822,8 @@
         </p:nvSpPr>
         <p:spPr>
           <a:xfrm>
-            <a:off x="1920240" y="3566160"/>
-            <a:ext cx="457200" cy="365760"/>
+            <a:off x="1819656" y="3566160"/>
+            <a:ext cx="411480" cy="365760"/>
           </a:xfrm>
           <a:prstGeom prst="rect">
             <a:avLst/>
@@ -13892,8 +13857,8 @@
         </p:nvSpPr>
         <p:spPr>
           <a:xfrm>
-            <a:off x="2377440" y="3456432"/>
-            <a:ext cx="1417320" cy="1115568"/>
+            <a:off x="2231136" y="3456432"/>
+            <a:ext cx="1316736" cy="1115568"/>
           </a:xfrm>
           <a:prstGeom prst="rect">
             <a:avLst/>
@@ -13937,8 +13902,8 @@
         </p:nvSpPr>
         <p:spPr>
           <a:xfrm>
-            <a:off x="2450592" y="3566160"/>
-            <a:ext cx="1280160" cy="914400"/>
+            <a:off x="2304288" y="3566160"/>
+            <a:ext cx="1179576" cy="914400"/>
           </a:xfrm>
           <a:prstGeom prst="rect">
             <a:avLst/>
@@ -13973,8 +13938,8 @@
         </p:nvSpPr>
         <p:spPr>
           <a:xfrm>
-            <a:off x="3840480" y="3566160"/>
-            <a:ext cx="457200" cy="365760"/>
+            <a:off x="3593591" y="3566160"/>
+            <a:ext cx="411480" cy="365760"/>
           </a:xfrm>
           <a:prstGeom prst="rect">
             <a:avLst/>
@@ -14008,8 +13973,8 @@
         </p:nvSpPr>
         <p:spPr>
           <a:xfrm>
-            <a:off x="4297680" y="3456432"/>
-            <a:ext cx="1417320" cy="1115568"/>
+            <a:off x="4005072" y="3456432"/>
+            <a:ext cx="1316736" cy="1115568"/>
           </a:xfrm>
           <a:prstGeom prst="rect">
             <a:avLst/>
@@ -14053,8 +14018,8 @@
         </p:nvSpPr>
         <p:spPr>
           <a:xfrm>
-            <a:off x="4370832" y="3566160"/>
-            <a:ext cx="1280160" cy="914400"/>
+            <a:off x="4078224" y="3566160"/>
+            <a:ext cx="1179576" cy="914400"/>
           </a:xfrm>
           <a:prstGeom prst="rect">
             <a:avLst/>
@@ -14089,8 +14054,8 @@
         </p:nvSpPr>
         <p:spPr>
           <a:xfrm>
-            <a:off x="5760720" y="3566160"/>
-            <a:ext cx="457200" cy="365760"/>
+            <a:off x="5367528" y="3566160"/>
+            <a:ext cx="411480" cy="365760"/>
           </a:xfrm>
           <a:prstGeom prst="rect">
             <a:avLst/>
@@ -14124,8 +14089,8 @@
         </p:nvSpPr>
         <p:spPr>
           <a:xfrm>
-            <a:off x="6217920" y="3456432"/>
-            <a:ext cx="1417320" cy="1115568"/>
+            <a:off x="5779008" y="3456432"/>
+            <a:ext cx="1316736" cy="1115568"/>
           </a:xfrm>
           <a:prstGeom prst="rect">
             <a:avLst/>
@@ -14169,8 +14134,8 @@
         </p:nvSpPr>
         <p:spPr>
           <a:xfrm>
-            <a:off x="6291072" y="3566160"/>
-            <a:ext cx="1280160" cy="914400"/>
+            <a:off x="5852160" y="3566160"/>
+            <a:ext cx="1179576" cy="914400"/>
           </a:xfrm>
           <a:prstGeom prst="rect">
             <a:avLst/>
@@ -14205,8 +14170,8 @@
         </p:nvSpPr>
         <p:spPr>
           <a:xfrm>
-            <a:off x="7680960" y="3566160"/>
-            <a:ext cx="457200" cy="365760"/>
+            <a:off x="7141464" y="3566160"/>
+            <a:ext cx="411480" cy="365760"/>
           </a:xfrm>
           <a:prstGeom prst="rect">
             <a:avLst/>
@@ -14240,8 +14205,8 @@
         </p:nvSpPr>
         <p:spPr>
           <a:xfrm>
-            <a:off x="8138160" y="3456432"/>
-            <a:ext cx="1417320" cy="1115568"/>
+            <a:off x="7552944" y="3456432"/>
+            <a:ext cx="1316736" cy="1115568"/>
           </a:xfrm>
           <a:prstGeom prst="rect">
             <a:avLst/>
@@ -14285,8 +14250,8 @@
         </p:nvSpPr>
         <p:spPr>
           <a:xfrm>
-            <a:off x="8211312" y="3566160"/>
-            <a:ext cx="1280160" cy="914400"/>
+            <a:off x="7626096" y="3566160"/>
+            <a:ext cx="1179576" cy="914400"/>
           </a:xfrm>
           <a:prstGeom prst="rect">
             <a:avLst/>
@@ -14584,7 +14549,7 @@
         <p:spPr>
           <a:xfrm>
             <a:off x="457200" y="1234440"/>
-            <a:ext cx="3108960" cy="347472"/>
+            <a:ext cx="3108960" cy="274320"/>
           </a:xfrm>
           <a:prstGeom prst="rect">
             <a:avLst/>
@@ -14626,23 +14591,23 @@
         </p:nvSpPr>
         <p:spPr>
           <a:xfrm>
-            <a:off x="548640" y="1298448"/>
-            <a:ext cx="2926080" cy="237744"/>
-          </a:xfrm>
-          <a:prstGeom prst="rect">
-            <a:avLst/>
-          </a:prstGeom>
-          <a:noFill/>
-        </p:spPr>
-        <p:txBody>
-          <a:bodyPr wrap="square">
-            <a:spAutoFit/>
-          </a:bodyPr>
-          <a:lstStyle/>
-          <a:p>
-            <a:pPr algn="ctr"/>
-            <a:r>
-              <a:rPr sz="1000" b="1" i="0">
+            <a:off x="548640" y="1271016"/>
+            <a:ext cx="2926080" cy="201168"/>
+          </a:xfrm>
+          <a:prstGeom prst="rect">
+            <a:avLst/>
+          </a:prstGeom>
+          <a:noFill/>
+        </p:spPr>
+        <p:txBody>
+          <a:bodyPr wrap="square">
+            <a:spAutoFit/>
+          </a:bodyPr>
+          <a:lstStyle/>
+          <a:p>
+            <a:pPr algn="ctr"/>
+            <a:r>
+              <a:rPr sz="900" b="1" i="0">
                 <a:solidFill>
                   <a:srgbClr val="FFFFFF"/>
                 </a:solidFill>
@@ -14661,23 +14626,23 @@
         </p:nvSpPr>
         <p:spPr>
           <a:xfrm>
-            <a:off x="1554480" y="1618488"/>
-            <a:ext cx="365760" cy="201168"/>
-          </a:xfrm>
-          <a:prstGeom prst="rect">
-            <a:avLst/>
-          </a:prstGeom>
-          <a:noFill/>
-        </p:spPr>
-        <p:txBody>
-          <a:bodyPr wrap="square">
-            <a:spAutoFit/>
-          </a:bodyPr>
-          <a:lstStyle/>
-          <a:p>
-            <a:pPr algn="ctr"/>
-            <a:r>
-              <a:rPr sz="1100" b="0" i="0">
+            <a:off x="1554480" y="1536192"/>
+            <a:ext cx="365760" cy="118872"/>
+          </a:xfrm>
+          <a:prstGeom prst="rect">
+            <a:avLst/>
+          </a:prstGeom>
+          <a:noFill/>
+        </p:spPr>
+        <p:txBody>
+          <a:bodyPr wrap="square">
+            <a:spAutoFit/>
+          </a:bodyPr>
+          <a:lstStyle/>
+          <a:p>
+            <a:pPr algn="ctr"/>
+            <a:r>
+              <a:rPr sz="900" b="0" i="0">
                 <a:solidFill>
                   <a:srgbClr val="5A6478"/>
                 </a:solidFill>
@@ -14696,8 +14661,8 @@
         </p:nvSpPr>
         <p:spPr>
           <a:xfrm>
-            <a:off x="457200" y="1847088"/>
-            <a:ext cx="3108960" cy="347472"/>
+            <a:off x="457200" y="1682496"/>
+            <a:ext cx="3108960" cy="274320"/>
           </a:xfrm>
           <a:prstGeom prst="rect">
             <a:avLst/>
@@ -14739,23 +14704,23 @@
         </p:nvSpPr>
         <p:spPr>
           <a:xfrm>
-            <a:off x="548640" y="1911095"/>
-            <a:ext cx="2926080" cy="237744"/>
-          </a:xfrm>
-          <a:prstGeom prst="rect">
-            <a:avLst/>
-          </a:prstGeom>
-          <a:noFill/>
-        </p:spPr>
-        <p:txBody>
-          <a:bodyPr wrap="square">
-            <a:spAutoFit/>
-          </a:bodyPr>
-          <a:lstStyle/>
-          <a:p>
-            <a:pPr algn="ctr"/>
-            <a:r>
-              <a:rPr sz="1000" b="1" i="0">
+            <a:off x="548640" y="1719072"/>
+            <a:ext cx="2926080" cy="201168"/>
+          </a:xfrm>
+          <a:prstGeom prst="rect">
+            <a:avLst/>
+          </a:prstGeom>
+          <a:noFill/>
+        </p:spPr>
+        <p:txBody>
+          <a:bodyPr wrap="square">
+            <a:spAutoFit/>
+          </a:bodyPr>
+          <a:lstStyle/>
+          <a:p>
+            <a:pPr algn="ctr"/>
+            <a:r>
+              <a:rPr sz="900" b="1" i="0">
                 <a:solidFill>
                   <a:srgbClr val="FFFFFF"/>
                 </a:solidFill>
@@ -14774,23 +14739,23 @@
         </p:nvSpPr>
         <p:spPr>
           <a:xfrm>
-            <a:off x="1554480" y="2231136"/>
-            <a:ext cx="365760" cy="201168"/>
-          </a:xfrm>
-          <a:prstGeom prst="rect">
-            <a:avLst/>
-          </a:prstGeom>
-          <a:noFill/>
-        </p:spPr>
-        <p:txBody>
-          <a:bodyPr wrap="square">
-            <a:spAutoFit/>
-          </a:bodyPr>
-          <a:lstStyle/>
-          <a:p>
-            <a:pPr algn="ctr"/>
-            <a:r>
-              <a:rPr sz="1100" b="0" i="0">
+            <a:off x="1554480" y="1984248"/>
+            <a:ext cx="365760" cy="118872"/>
+          </a:xfrm>
+          <a:prstGeom prst="rect">
+            <a:avLst/>
+          </a:prstGeom>
+          <a:noFill/>
+        </p:spPr>
+        <p:txBody>
+          <a:bodyPr wrap="square">
+            <a:spAutoFit/>
+          </a:bodyPr>
+          <a:lstStyle/>
+          <a:p>
+            <a:pPr algn="ctr"/>
+            <a:r>
+              <a:rPr sz="900" b="0" i="0">
                 <a:solidFill>
                   <a:srgbClr val="5A6478"/>
                 </a:solidFill>
@@ -14809,8 +14774,8 @@
         </p:nvSpPr>
         <p:spPr>
           <a:xfrm>
-            <a:off x="457200" y="2459736"/>
-            <a:ext cx="3108960" cy="347472"/>
+            <a:off x="457200" y="2130552"/>
+            <a:ext cx="3108960" cy="274320"/>
           </a:xfrm>
           <a:prstGeom prst="rect">
             <a:avLst/>
@@ -14852,23 +14817,23 @@
         </p:nvSpPr>
         <p:spPr>
           <a:xfrm>
-            <a:off x="548640" y="2523744"/>
-            <a:ext cx="2926080" cy="237744"/>
-          </a:xfrm>
-          <a:prstGeom prst="rect">
-            <a:avLst/>
-          </a:prstGeom>
-          <a:noFill/>
-        </p:spPr>
-        <p:txBody>
-          <a:bodyPr wrap="square">
-            <a:spAutoFit/>
-          </a:bodyPr>
-          <a:lstStyle/>
-          <a:p>
-            <a:pPr algn="ctr"/>
-            <a:r>
-              <a:rPr sz="1000" b="1" i="0">
+            <a:off x="548640" y="2167128"/>
+            <a:ext cx="2926080" cy="201168"/>
+          </a:xfrm>
+          <a:prstGeom prst="rect">
+            <a:avLst/>
+          </a:prstGeom>
+          <a:noFill/>
+        </p:spPr>
+        <p:txBody>
+          <a:bodyPr wrap="square">
+            <a:spAutoFit/>
+          </a:bodyPr>
+          <a:lstStyle/>
+          <a:p>
+            <a:pPr algn="ctr"/>
+            <a:r>
+              <a:rPr sz="900" b="1" i="0">
                 <a:solidFill>
                   <a:srgbClr val="FFFFFF"/>
                 </a:solidFill>
@@ -14887,23 +14852,23 @@
         </p:nvSpPr>
         <p:spPr>
           <a:xfrm>
-            <a:off x="1554480" y="2843784"/>
-            <a:ext cx="365760" cy="201168"/>
-          </a:xfrm>
-          <a:prstGeom prst="rect">
-            <a:avLst/>
-          </a:prstGeom>
-          <a:noFill/>
-        </p:spPr>
-        <p:txBody>
-          <a:bodyPr wrap="square">
-            <a:spAutoFit/>
-          </a:bodyPr>
-          <a:lstStyle/>
-          <a:p>
-            <a:pPr algn="ctr"/>
-            <a:r>
-              <a:rPr sz="1100" b="0" i="0">
+            <a:off x="1554480" y="2432304"/>
+            <a:ext cx="365760" cy="118872"/>
+          </a:xfrm>
+          <a:prstGeom prst="rect">
+            <a:avLst/>
+          </a:prstGeom>
+          <a:noFill/>
+        </p:spPr>
+        <p:txBody>
+          <a:bodyPr wrap="square">
+            <a:spAutoFit/>
+          </a:bodyPr>
+          <a:lstStyle/>
+          <a:p>
+            <a:pPr algn="ctr"/>
+            <a:r>
+              <a:rPr sz="900" b="0" i="0">
                 <a:solidFill>
                   <a:srgbClr val="5A6478"/>
                 </a:solidFill>
@@ -14922,8 +14887,8 @@
         </p:nvSpPr>
         <p:spPr>
           <a:xfrm>
-            <a:off x="457200" y="3072384"/>
-            <a:ext cx="3108960" cy="347472"/>
+            <a:off x="457200" y="2578608"/>
+            <a:ext cx="3108960" cy="274320"/>
           </a:xfrm>
           <a:prstGeom prst="rect">
             <a:avLst/>
@@ -14965,23 +14930,23 @@
         </p:nvSpPr>
         <p:spPr>
           <a:xfrm>
-            <a:off x="548640" y="3136391"/>
-            <a:ext cx="2926080" cy="237744"/>
-          </a:xfrm>
-          <a:prstGeom prst="rect">
-            <a:avLst/>
-          </a:prstGeom>
-          <a:noFill/>
-        </p:spPr>
-        <p:txBody>
-          <a:bodyPr wrap="square">
-            <a:spAutoFit/>
-          </a:bodyPr>
-          <a:lstStyle/>
-          <a:p>
-            <a:pPr algn="ctr"/>
-            <a:r>
-              <a:rPr sz="1000" b="1" i="0">
+            <a:off x="548640" y="2615184"/>
+            <a:ext cx="2926080" cy="201168"/>
+          </a:xfrm>
+          <a:prstGeom prst="rect">
+            <a:avLst/>
+          </a:prstGeom>
+          <a:noFill/>
+        </p:spPr>
+        <p:txBody>
+          <a:bodyPr wrap="square">
+            <a:spAutoFit/>
+          </a:bodyPr>
+          <a:lstStyle/>
+          <a:p>
+            <a:pPr algn="ctr"/>
+            <a:r>
+              <a:rPr sz="900" b="1" i="0">
                 <a:solidFill>
                   <a:srgbClr val="FFFFFF"/>
                 </a:solidFill>
@@ -15000,23 +14965,23 @@
         </p:nvSpPr>
         <p:spPr>
           <a:xfrm>
-            <a:off x="1554480" y="3456432"/>
-            <a:ext cx="365760" cy="201168"/>
-          </a:xfrm>
-          <a:prstGeom prst="rect">
-            <a:avLst/>
-          </a:prstGeom>
-          <a:noFill/>
-        </p:spPr>
-        <p:txBody>
-          <a:bodyPr wrap="square">
-            <a:spAutoFit/>
-          </a:bodyPr>
-          <a:lstStyle/>
-          <a:p>
-            <a:pPr algn="ctr"/>
-            <a:r>
-              <a:rPr sz="1100" b="0" i="0">
+            <a:off x="1554480" y="2880360"/>
+            <a:ext cx="365760" cy="118872"/>
+          </a:xfrm>
+          <a:prstGeom prst="rect">
+            <a:avLst/>
+          </a:prstGeom>
+          <a:noFill/>
+        </p:spPr>
+        <p:txBody>
+          <a:bodyPr wrap="square">
+            <a:spAutoFit/>
+          </a:bodyPr>
+          <a:lstStyle/>
+          <a:p>
+            <a:pPr algn="ctr"/>
+            <a:r>
+              <a:rPr sz="900" b="0" i="0">
                 <a:solidFill>
                   <a:srgbClr val="5A6478"/>
                 </a:solidFill>
@@ -15035,8 +15000,8 @@
         </p:nvSpPr>
         <p:spPr>
           <a:xfrm>
-            <a:off x="457200" y="3685031"/>
-            <a:ext cx="3108960" cy="347472"/>
+            <a:off x="457200" y="3026664"/>
+            <a:ext cx="3108960" cy="274320"/>
           </a:xfrm>
           <a:prstGeom prst="rect">
             <a:avLst/>
@@ -15078,23 +15043,23 @@
         </p:nvSpPr>
         <p:spPr>
           <a:xfrm>
-            <a:off x="548640" y="3749039"/>
-            <a:ext cx="2926080" cy="237744"/>
-          </a:xfrm>
-          <a:prstGeom prst="rect">
-            <a:avLst/>
-          </a:prstGeom>
-          <a:noFill/>
-        </p:spPr>
-        <p:txBody>
-          <a:bodyPr wrap="square">
-            <a:spAutoFit/>
-          </a:bodyPr>
-          <a:lstStyle/>
-          <a:p>
-            <a:pPr algn="ctr"/>
-            <a:r>
-              <a:rPr sz="1000" b="1" i="0">
+            <a:off x="548640" y="3063240"/>
+            <a:ext cx="2926080" cy="201168"/>
+          </a:xfrm>
+          <a:prstGeom prst="rect">
+            <a:avLst/>
+          </a:prstGeom>
+          <a:noFill/>
+        </p:spPr>
+        <p:txBody>
+          <a:bodyPr wrap="square">
+            <a:spAutoFit/>
+          </a:bodyPr>
+          <a:lstStyle/>
+          <a:p>
+            <a:pPr algn="ctr"/>
+            <a:r>
+              <a:rPr sz="900" b="1" i="0">
                 <a:solidFill>
                   <a:srgbClr val="FFFFFF"/>
                 </a:solidFill>
@@ -15113,23 +15078,23 @@
         </p:nvSpPr>
         <p:spPr>
           <a:xfrm>
-            <a:off x="1554480" y="4069079"/>
-            <a:ext cx="365760" cy="201168"/>
-          </a:xfrm>
-          <a:prstGeom prst="rect">
-            <a:avLst/>
-          </a:prstGeom>
-          <a:noFill/>
-        </p:spPr>
-        <p:txBody>
-          <a:bodyPr wrap="square">
-            <a:spAutoFit/>
-          </a:bodyPr>
-          <a:lstStyle/>
-          <a:p>
-            <a:pPr algn="ctr"/>
-            <a:r>
-              <a:rPr sz="1100" b="0" i="0">
+            <a:off x="1554480" y="3328416"/>
+            <a:ext cx="365760" cy="118872"/>
+          </a:xfrm>
+          <a:prstGeom prst="rect">
+            <a:avLst/>
+          </a:prstGeom>
+          <a:noFill/>
+        </p:spPr>
+        <p:txBody>
+          <a:bodyPr wrap="square">
+            <a:spAutoFit/>
+          </a:bodyPr>
+          <a:lstStyle/>
+          <a:p>
+            <a:pPr algn="ctr"/>
+            <a:r>
+              <a:rPr sz="900" b="0" i="0">
                 <a:solidFill>
                   <a:srgbClr val="5A6478"/>
                 </a:solidFill>
@@ -15148,8 +15113,8 @@
         </p:nvSpPr>
         <p:spPr>
           <a:xfrm>
-            <a:off x="457200" y="4297679"/>
-            <a:ext cx="3108960" cy="347472"/>
+            <a:off x="457200" y="3474720"/>
+            <a:ext cx="3108960" cy="274320"/>
           </a:xfrm>
           <a:prstGeom prst="rect">
             <a:avLst/>
@@ -15191,23 +15156,23 @@
         </p:nvSpPr>
         <p:spPr>
           <a:xfrm>
-            <a:off x="548640" y="4361688"/>
-            <a:ext cx="2926080" cy="237744"/>
-          </a:xfrm>
-          <a:prstGeom prst="rect">
-            <a:avLst/>
-          </a:prstGeom>
-          <a:noFill/>
-        </p:spPr>
-        <p:txBody>
-          <a:bodyPr wrap="square">
-            <a:spAutoFit/>
-          </a:bodyPr>
-          <a:lstStyle/>
-          <a:p>
-            <a:pPr algn="ctr"/>
-            <a:r>
-              <a:rPr sz="1000" b="1" i="0">
+            <a:off x="548640" y="3511296"/>
+            <a:ext cx="2926080" cy="201168"/>
+          </a:xfrm>
+          <a:prstGeom prst="rect">
+            <a:avLst/>
+          </a:prstGeom>
+          <a:noFill/>
+        </p:spPr>
+        <p:txBody>
+          <a:bodyPr wrap="square">
+            <a:spAutoFit/>
+          </a:bodyPr>
+          <a:lstStyle/>
+          <a:p>
+            <a:pPr algn="ctr"/>
+            <a:r>
+              <a:rPr sz="900" b="1" i="0">
                 <a:solidFill>
                   <a:srgbClr val="FFFFFF"/>
                 </a:solidFill>
@@ -15226,23 +15191,23 @@
         </p:nvSpPr>
         <p:spPr>
           <a:xfrm>
-            <a:off x="1554480" y="4681727"/>
-            <a:ext cx="365760" cy="201168"/>
-          </a:xfrm>
-          <a:prstGeom prst="rect">
-            <a:avLst/>
-          </a:prstGeom>
-          <a:noFill/>
-        </p:spPr>
-        <p:txBody>
-          <a:bodyPr wrap="square">
-            <a:spAutoFit/>
-          </a:bodyPr>
-          <a:lstStyle/>
-          <a:p>
-            <a:pPr algn="ctr"/>
-            <a:r>
-              <a:rPr sz="1100" b="0" i="0">
+            <a:off x="1554480" y="3776472"/>
+            <a:ext cx="365760" cy="118872"/>
+          </a:xfrm>
+          <a:prstGeom prst="rect">
+            <a:avLst/>
+          </a:prstGeom>
+          <a:noFill/>
+        </p:spPr>
+        <p:txBody>
+          <a:bodyPr wrap="square">
+            <a:spAutoFit/>
+          </a:bodyPr>
+          <a:lstStyle/>
+          <a:p>
+            <a:pPr algn="ctr"/>
+            <a:r>
+              <a:rPr sz="900" b="0" i="0">
                 <a:solidFill>
                   <a:srgbClr val="5A6478"/>
                 </a:solidFill>
@@ -15261,8 +15226,8 @@
         </p:nvSpPr>
         <p:spPr>
           <a:xfrm>
-            <a:off x="457200" y="4910327"/>
-            <a:ext cx="3108960" cy="347472"/>
+            <a:off x="457200" y="3922776"/>
+            <a:ext cx="3108960" cy="274320"/>
           </a:xfrm>
           <a:prstGeom prst="rect">
             <a:avLst/>
@@ -15304,23 +15269,23 @@
         </p:nvSpPr>
         <p:spPr>
           <a:xfrm>
-            <a:off x="548640" y="4974336"/>
-            <a:ext cx="2926080" cy="237744"/>
-          </a:xfrm>
-          <a:prstGeom prst="rect">
-            <a:avLst/>
-          </a:prstGeom>
-          <a:noFill/>
-        </p:spPr>
-        <p:txBody>
-          <a:bodyPr wrap="square">
-            <a:spAutoFit/>
-          </a:bodyPr>
-          <a:lstStyle/>
-          <a:p>
-            <a:pPr algn="ctr"/>
-            <a:r>
-              <a:rPr sz="1000" b="1" i="0">
+            <a:off x="548640" y="3959352"/>
+            <a:ext cx="2926080" cy="201168"/>
+          </a:xfrm>
+          <a:prstGeom prst="rect">
+            <a:avLst/>
+          </a:prstGeom>
+          <a:noFill/>
+        </p:spPr>
+        <p:txBody>
+          <a:bodyPr wrap="square">
+            <a:spAutoFit/>
+          </a:bodyPr>
+          <a:lstStyle/>
+          <a:p>
+            <a:pPr algn="ctr"/>
+            <a:r>
+              <a:rPr sz="900" b="1" i="0">
                 <a:solidFill>
                   <a:srgbClr val="FFFFFF"/>
                 </a:solidFill>
@@ -15339,23 +15304,23 @@
         </p:nvSpPr>
         <p:spPr>
           <a:xfrm>
-            <a:off x="1554480" y="5294375"/>
-            <a:ext cx="365760" cy="201168"/>
-          </a:xfrm>
-          <a:prstGeom prst="rect">
-            <a:avLst/>
-          </a:prstGeom>
-          <a:noFill/>
-        </p:spPr>
-        <p:txBody>
-          <a:bodyPr wrap="square">
-            <a:spAutoFit/>
-          </a:bodyPr>
-          <a:lstStyle/>
-          <a:p>
-            <a:pPr algn="ctr"/>
-            <a:r>
-              <a:rPr sz="1100" b="0" i="0">
+            <a:off x="1554480" y="4224528"/>
+            <a:ext cx="365760" cy="118872"/>
+          </a:xfrm>
+          <a:prstGeom prst="rect">
+            <a:avLst/>
+          </a:prstGeom>
+          <a:noFill/>
+        </p:spPr>
+        <p:txBody>
+          <a:bodyPr wrap="square">
+            <a:spAutoFit/>
+          </a:bodyPr>
+          <a:lstStyle/>
+          <a:p>
+            <a:pPr algn="ctr"/>
+            <a:r>
+              <a:rPr sz="900" b="0" i="0">
                 <a:solidFill>
                   <a:srgbClr val="5A6478"/>
                 </a:solidFill>
@@ -15374,8 +15339,8 @@
         </p:nvSpPr>
         <p:spPr>
           <a:xfrm>
-            <a:off x="457200" y="5522975"/>
-            <a:ext cx="3108960" cy="347472"/>
+            <a:off x="457200" y="4370832"/>
+            <a:ext cx="3108960" cy="274320"/>
           </a:xfrm>
           <a:prstGeom prst="rect">
             <a:avLst/>
@@ -15417,23 +15382,23 @@
         </p:nvSpPr>
         <p:spPr>
           <a:xfrm>
-            <a:off x="548640" y="5586983"/>
-            <a:ext cx="2926080" cy="237744"/>
-          </a:xfrm>
-          <a:prstGeom prst="rect">
-            <a:avLst/>
-          </a:prstGeom>
-          <a:noFill/>
-        </p:spPr>
-        <p:txBody>
-          <a:bodyPr wrap="square">
-            <a:spAutoFit/>
-          </a:bodyPr>
-          <a:lstStyle/>
-          <a:p>
-            <a:pPr algn="ctr"/>
-            <a:r>
-              <a:rPr sz="1000" b="1" i="0">
+            <a:off x="548640" y="4407408"/>
+            <a:ext cx="2926080" cy="201168"/>
+          </a:xfrm>
+          <a:prstGeom prst="rect">
+            <a:avLst/>
+          </a:prstGeom>
+          <a:noFill/>
+        </p:spPr>
+        <p:txBody>
+          <a:bodyPr wrap="square">
+            <a:spAutoFit/>
+          </a:bodyPr>
+          <a:lstStyle/>
+          <a:p>
+            <a:pPr algn="ctr"/>
+            <a:r>
+              <a:rPr sz="900" b="1" i="0">
                 <a:solidFill>
                   <a:srgbClr val="FFFFFF"/>
                 </a:solidFill>
